--- a/assets/ppt/cfg/cfg2-ambiguity.pptx
+++ b/assets/ppt/cfg/cfg2-ambiguity.pptx
@@ -2317,7 +2317,7 @@
           <a:p>
             <a:fld id="{1B6DC762-1116-2146-A47C-D79A5A5DBAFD}" type="datetime1">
               <a:rPr lang="en-CA" smtClean="0"/>
-              <a:t>2020-09-27</a:t>
+              <a:t>2025-06-09</a:t>
             </a:fld>
             <a:endParaRPr lang="en-US"/>
           </a:p>
@@ -2515,7 +2515,7 @@
           <a:p>
             <a:fld id="{725FEDD1-5A1B-2342-BAF0-F7C5511A73CE}" type="datetime1">
               <a:rPr lang="en-CA" smtClean="0"/>
-              <a:t>2020-09-27</a:t>
+              <a:t>2025-06-09</a:t>
             </a:fld>
             <a:endParaRPr lang="en-US"/>
           </a:p>
@@ -2723,7 +2723,7 @@
           <a:p>
             <a:fld id="{F09E59AE-0AE1-4048-8BD6-D39FC0EBB194}" type="datetime1">
               <a:rPr lang="en-CA" smtClean="0"/>
-              <a:t>2020-09-27</a:t>
+              <a:t>2025-06-09</a:t>
             </a:fld>
             <a:endParaRPr lang="en-US"/>
           </a:p>
@@ -4198,7 +4198,7 @@
           <a:p>
             <a:fld id="{A2849525-9B7D-5945-A782-775278635E42}" type="datetime1">
               <a:rPr lang="en-CA" smtClean="0"/>
-              <a:t>2020-09-27</a:t>
+              <a:t>2025-06-09</a:t>
             </a:fld>
             <a:endParaRPr lang="en-US"/>
           </a:p>
@@ -4473,7 +4473,7 @@
           <a:p>
             <a:fld id="{D05E1499-BDD1-6940-8C79-13A8B8E63D57}" type="datetime1">
               <a:rPr lang="en-CA" smtClean="0"/>
-              <a:t>2020-09-27</a:t>
+              <a:t>2025-06-09</a:t>
             </a:fld>
             <a:endParaRPr lang="en-US"/>
           </a:p>
@@ -4738,7 +4738,7 @@
           <a:p>
             <a:fld id="{17E70EF3-18A7-4644-8DA2-1EB9CA66C736}" type="datetime1">
               <a:rPr lang="en-CA" smtClean="0"/>
-              <a:t>2020-09-27</a:t>
+              <a:t>2025-06-09</a:t>
             </a:fld>
             <a:endParaRPr lang="en-US"/>
           </a:p>
@@ -5150,7 +5150,7 @@
           <a:p>
             <a:fld id="{54538FC1-2481-FB4A-91E5-87F3422DE2D5}" type="datetime1">
               <a:rPr lang="en-CA" smtClean="0"/>
-              <a:t>2020-09-27</a:t>
+              <a:t>2025-06-09</a:t>
             </a:fld>
             <a:endParaRPr lang="en-US"/>
           </a:p>
@@ -5291,7 +5291,7 @@
           <a:p>
             <a:fld id="{93D5C515-1622-C840-89B2-A4A55D34866A}" type="datetime1">
               <a:rPr lang="en-CA" smtClean="0"/>
-              <a:t>2020-09-27</a:t>
+              <a:t>2025-06-09</a:t>
             </a:fld>
             <a:endParaRPr lang="en-US"/>
           </a:p>
@@ -5404,7 +5404,7 @@
           <a:p>
             <a:fld id="{B9077E75-6C88-BB47-AC6F-0DCA859E7113}" type="datetime1">
               <a:rPr lang="en-CA" smtClean="0"/>
-              <a:t>2020-09-27</a:t>
+              <a:t>2025-06-09</a:t>
             </a:fld>
             <a:endParaRPr lang="en-US"/>
           </a:p>
@@ -5715,7 +5715,7 @@
           <a:p>
             <a:fld id="{1AD12F8B-7E05-A047-BAC3-EE71BEBBE5BE}" type="datetime1">
               <a:rPr lang="en-CA" smtClean="0"/>
-              <a:t>2020-09-27</a:t>
+              <a:t>2025-06-09</a:t>
             </a:fld>
             <a:endParaRPr lang="en-US"/>
           </a:p>
@@ -6003,7 +6003,7 @@
           <a:p>
             <a:fld id="{C1D9F72A-E93E-B546-8268-6408A6E1DA62}" type="datetime1">
               <a:rPr lang="en-CA" smtClean="0"/>
-              <a:t>2020-09-27</a:t>
+              <a:t>2025-06-09</a:t>
             </a:fld>
             <a:endParaRPr lang="en-US"/>
           </a:p>
@@ -6246,7 +6246,7 @@
             <a:fld id="{97DF4AC7-DB73-7444-A2A7-FD79FE1A2B2B}" type="datetime1">
               <a:rPr lang="en-CA" smtClean="0"/>
               <a:pPr/>
-              <a:t>2020-09-27</a:t>
+              <a:t>2025-06-09</a:t>
             </a:fld>
             <a:endParaRPr lang="en-US" dirty="0"/>
           </a:p>
@@ -22788,8 +22788,23 @@
           <a:p>
             <a:pPr lvl="1"/>
             <a:r>
+              <a:rPr lang="en-CA"/>
+              <a:t>'</a:t>
+            </a:r>
+            <a:r>
+              <a:rPr lang="en-CA">
+                <a:latin typeface="Consolas" panose="020B0609020204030204" pitchFamily="49" charset="0"/>
+                <a:cs typeface="Consolas" panose="020B0609020204030204" pitchFamily="49" charset="0"/>
+              </a:rPr>
+              <a:t>-'</a:t>
+            </a:r>
+            <a:r>
+              <a:rPr lang="en-CA"/>
+              <a:t> </a:t>
+            </a:r>
+            <a:r>
               <a:rPr lang="en-CA" dirty="0"/>
-              <a:t>“-” is left associative</a:t>
+              <a:t>is left associative</a:t>
             </a:r>
           </a:p>
           <a:p>
